--- a/cover.pptx
+++ b/cover.pptx
@@ -112,6 +112,83 @@
 </p:presentation>
 </file>
 
+<file path=ppt/revisionInfo.xml><?xml version="1.0" encoding="utf-8"?>
+<p1510:revInfo xmlns:a="http://schemas.openxmlformats.org/drawingml/2006/main" xmlns:r="http://schemas.openxmlformats.org/officeDocument/2006/relationships" xmlns:p1510="http://schemas.microsoft.com/office/powerpoint/2015/10/main">
+  <p1510:revLst>
+    <p1510:client id="{3D1BD783-8D78-44F6-9056-F285BB4F9CC4}" v="4" dt="2026-02-10T03:23:47.615"/>
+  </p1510:revLst>
+</p1510:revInfo>
+</file>
+
+<file path=ppt/changesInfos/changesInfo1.xml><?xml version="1.0" encoding="utf-8"?>
+<pc:chgInfo xmlns:a="http://schemas.openxmlformats.org/drawingml/2006/main" xmlns:r="http://schemas.openxmlformats.org/officeDocument/2006/relationships" xmlns:ac="http://schemas.microsoft.com/office/drawing/2013/main/command" xmlns:pc="http://schemas.microsoft.com/office/powerpoint/2013/main/command">
+  <pc:docChgLst>
+    <pc:chgData name="Yu Mi" userId="3ba48dc33aa0ce78" providerId="LiveId" clId="{3F5FB2F0-E656-4E65-B5A1-573F7D5D3E8D}"/>
+    <pc:docChg chg="undo custSel modSld">
+      <pc:chgData name="Yu Mi" userId="3ba48dc33aa0ce78" providerId="LiveId" clId="{3F5FB2F0-E656-4E65-B5A1-573F7D5D3E8D}" dt="2026-02-10T03:47:17.477" v="90" actId="1076"/>
+      <pc:docMkLst>
+        <pc:docMk/>
+      </pc:docMkLst>
+      <pc:sldChg chg="modSp mod">
+        <pc:chgData name="Yu Mi" userId="3ba48dc33aa0ce78" providerId="LiveId" clId="{3F5FB2F0-E656-4E65-B5A1-573F7D5D3E8D}" dt="2026-02-10T03:47:17.477" v="90" actId="1076"/>
+        <pc:sldMkLst>
+          <pc:docMk/>
+          <pc:sldMk cId="3851809487" sldId="257"/>
+        </pc:sldMkLst>
+        <pc:spChg chg="mod">
+          <ac:chgData name="Yu Mi" userId="3ba48dc33aa0ce78" providerId="LiveId" clId="{3F5FB2F0-E656-4E65-B5A1-573F7D5D3E8D}" dt="2026-02-10T03:47:17.477" v="90" actId="1076"/>
+          <ac:spMkLst>
+            <pc:docMk/>
+            <pc:sldMk cId="3851809487" sldId="257"/>
+            <ac:spMk id="12" creationId="{658E091F-54A8-C943-ACCF-ACFDF3857992}"/>
+          </ac:spMkLst>
+        </pc:spChg>
+        <pc:spChg chg="mod">
+          <ac:chgData name="Yu Mi" userId="3ba48dc33aa0ce78" providerId="LiveId" clId="{3F5FB2F0-E656-4E65-B5A1-573F7D5D3E8D}" dt="2026-02-10T03:23:40.092" v="85" actId="20577"/>
+          <ac:spMkLst>
+            <pc:docMk/>
+            <pc:sldMk cId="3851809487" sldId="257"/>
+            <ac:spMk id="13" creationId="{1963F833-2C96-B244-B689-8B9232E53A23}"/>
+          </ac:spMkLst>
+        </pc:spChg>
+        <pc:spChg chg="mod">
+          <ac:chgData name="Yu Mi" userId="3ba48dc33aa0ce78" providerId="LiveId" clId="{3F5FB2F0-E656-4E65-B5A1-573F7D5D3E8D}" dt="2026-02-10T03:22:34.876" v="7" actId="20577"/>
+          <ac:spMkLst>
+            <pc:docMk/>
+            <pc:sldMk cId="3851809487" sldId="257"/>
+            <ac:spMk id="15" creationId="{F4794B7C-D8B8-1646-806E-EE06D47AF886}"/>
+          </ac:spMkLst>
+        </pc:spChg>
+        <pc:spChg chg="mod">
+          <ac:chgData name="Yu Mi" userId="3ba48dc33aa0ce78" providerId="LiveId" clId="{3F5FB2F0-E656-4E65-B5A1-573F7D5D3E8D}" dt="2026-02-10T03:23:21.270" v="62" actId="20577"/>
+          <ac:spMkLst>
+            <pc:docMk/>
+            <pc:sldMk cId="3851809487" sldId="257"/>
+            <ac:spMk id="16" creationId="{A9EDA749-C458-6B44-8261-2E64BAA1F7B6}"/>
+          </ac:spMkLst>
+        </pc:spChg>
+        <pc:spChg chg="mod">
+          <ac:chgData name="Yu Mi" userId="3ba48dc33aa0ce78" providerId="LiveId" clId="{3F5FB2F0-E656-4E65-B5A1-573F7D5D3E8D}" dt="2026-02-10T03:22:47.025" v="23" actId="20577"/>
+          <ac:spMkLst>
+            <pc:docMk/>
+            <pc:sldMk cId="3851809487" sldId="257"/>
+            <ac:spMk id="19" creationId="{7D2E9541-D374-3147-9D69-0FAECEE5596A}"/>
+          </ac:spMkLst>
+        </pc:spChg>
+        <pc:spChg chg="mod">
+          <ac:chgData name="Yu Mi" userId="3ba48dc33aa0ce78" providerId="LiveId" clId="{3F5FB2F0-E656-4E65-B5A1-573F7D5D3E8D}" dt="2026-02-10T03:22:55.667" v="51" actId="20577"/>
+          <ac:spMkLst>
+            <pc:docMk/>
+            <pc:sldMk cId="3851809487" sldId="257"/>
+            <ac:spMk id="20" creationId="{04384D7C-1AE9-AE43-918C-7D54A74D8A06}"/>
+          </ac:spMkLst>
+        </pc:spChg>
+      </pc:sldChg>
+    </pc:docChg>
+  </pc:docChgLst>
+</pc:chgInfo>
+</file>
+
 <file path=ppt/slideLayouts/slideLayout1.xml><?xml version="1.0" encoding="utf-8"?>
 <p:sldLayout xmlns:a="http://schemas.openxmlformats.org/drawingml/2006/main" xmlns:r="http://schemas.openxmlformats.org/officeDocument/2006/relationships" xmlns:p="http://schemas.openxmlformats.org/presentationml/2006/main" preserve="1" userDrawn="1">
   <p:cSld name="タイトル スライド">
@@ -654,8 +731,8 @@
         </p:nvSpPr>
         <p:spPr>
           <a:xfrm>
-            <a:off x="332656" y="1280592"/>
-            <a:ext cx="461665" cy="2169825"/>
+            <a:off x="55657" y="1280592"/>
+            <a:ext cx="738664" cy="8402300"/>
           </a:xfrm>
           <a:prstGeom prst="rect">
             <a:avLst/>
@@ -670,8 +747,11 @@
           <a:p>
             <a:r>
               <a:rPr lang="ja-JP" altLang="en-US" dirty="0"/>
-              <a:t>卒業論文のタイトル</a:t>
+              <a:t>ゼロインテリジェンストレーダー市場における機械学習トレーダーの影響の解析</a:t>
             </a:r>
+          </a:p>
+          <a:p>
+            <a:endParaRPr lang="ja-JP" altLang="en-US" dirty="0"/>
           </a:p>
         </p:txBody>
       </p:sp>
@@ -704,10 +784,9 @@
           <a:lstStyle/>
           <a:p>
             <a:r>
-              <a:rPr lang="ja-JP" altLang="en-US" dirty="0"/>
-              <a:t>卒論太郎</a:t>
+              <a:rPr lang="ja-JP" altLang="en-US" sz="1800" dirty="0"/>
+              <a:t>箕輪勇佑</a:t>
             </a:r>
-            <a:endParaRPr lang="ja-JP" altLang="en-US" sz="1800" dirty="0"/>
           </a:p>
         </p:txBody>
       </p:sp>
@@ -726,7 +805,7 @@
         <p:spPr>
           <a:xfrm>
             <a:off x="2690759" y="2720752"/>
-            <a:ext cx="2274982" cy="369332"/>
+            <a:ext cx="2268570" cy="369332"/>
           </a:xfrm>
           <a:prstGeom prst="rect">
             <a:avLst/>
@@ -745,7 +824,7 @@
             </a:r>
             <a:r>
               <a:rPr kumimoji="1" lang="en-US" altLang="ja-JP" dirty="0"/>
-              <a:t>20XX</a:t>
+              <a:t>2026</a:t>
             </a:r>
             <a:r>
               <a:rPr kumimoji="1" lang="ja-JP" altLang="en-US" dirty="0"/>
@@ -769,7 +848,7 @@
         <p:spPr>
           <a:xfrm>
             <a:off x="1268760" y="3872880"/>
-            <a:ext cx="5112568" cy="400110"/>
+            <a:ext cx="5112568" cy="646331"/>
           </a:xfrm>
           <a:prstGeom prst="rect">
             <a:avLst/>
@@ -783,12 +862,9 @@
           <a:p>
             <a:pPr algn="ctr"/>
             <a:r>
-              <a:rPr lang="ja-JP" altLang="en-US" sz="2000" dirty="0">
-                <a:latin typeface="HaranoAjiMincho-Regular-Identity-H"/>
-              </a:rPr>
-              <a:t>卒業論文のタイトル</a:t>
+              <a:rPr lang="ja-JP" altLang="en-US" dirty="0"/>
+              <a:t>ゼロインテリジェンストレーダー市場における機械学習トレーダーの影響の解析</a:t>
             </a:r>
-            <a:endParaRPr lang="ja-JP" altLang="en-US" sz="2000" dirty="0"/>
           </a:p>
         </p:txBody>
       </p:sp>
@@ -877,7 +953,7 @@
         <p:spPr>
           <a:xfrm>
             <a:off x="2776520" y="7905328"/>
-            <a:ext cx="2122697" cy="369332"/>
+            <a:ext cx="2097049" cy="369332"/>
           </a:xfrm>
           <a:prstGeom prst="rect">
             <a:avLst/>
@@ -896,7 +972,11 @@
             </a:r>
             <a:r>
               <a:rPr kumimoji="1" lang="en-US" altLang="ja-JP" dirty="0"/>
-              <a:t> XXXXXXXX</a:t>
+              <a:t> </a:t>
+            </a:r>
+            <a:r>
+              <a:rPr lang="en-US" altLang="ja-JP" dirty="0"/>
+              <a:t>62219191</a:t>
             </a:r>
             <a:endParaRPr lang="ja-JP" altLang="en-US" dirty="0"/>
           </a:p>
@@ -931,7 +1011,7 @@
           <a:p>
             <a:r>
               <a:rPr lang="ja-JP" altLang="en-US" sz="3200" dirty="0"/>
-              <a:t>卒論太郎</a:t>
+              <a:t>箕輪勇佑</a:t>
             </a:r>
           </a:p>
         </p:txBody>

--- a/cover.pptx
+++ b/cover.pptx
@@ -125,18 +125,18 @@
   <pc:docChgLst>
     <pc:chgData name="Yu Mi" userId="3ba48dc33aa0ce78" providerId="LiveId" clId="{3F5FB2F0-E656-4E65-B5A1-573F7D5D3E8D}"/>
     <pc:docChg chg="undo custSel modSld">
-      <pc:chgData name="Yu Mi" userId="3ba48dc33aa0ce78" providerId="LiveId" clId="{3F5FB2F0-E656-4E65-B5A1-573F7D5D3E8D}" dt="2026-02-10T03:47:17.477" v="90" actId="1076"/>
+      <pc:chgData name="Yu Mi" userId="3ba48dc33aa0ce78" providerId="LiveId" clId="{3F5FB2F0-E656-4E65-B5A1-573F7D5D3E8D}" dt="2026-02-10T04:16:22.612" v="93" actId="255"/>
       <pc:docMkLst>
         <pc:docMk/>
       </pc:docMkLst>
       <pc:sldChg chg="modSp mod">
-        <pc:chgData name="Yu Mi" userId="3ba48dc33aa0ce78" providerId="LiveId" clId="{3F5FB2F0-E656-4E65-B5A1-573F7D5D3E8D}" dt="2026-02-10T03:47:17.477" v="90" actId="1076"/>
+        <pc:chgData name="Yu Mi" userId="3ba48dc33aa0ce78" providerId="LiveId" clId="{3F5FB2F0-E656-4E65-B5A1-573F7D5D3E8D}" dt="2026-02-10T04:16:22.612" v="93" actId="255"/>
         <pc:sldMkLst>
           <pc:docMk/>
           <pc:sldMk cId="3851809487" sldId="257"/>
         </pc:sldMkLst>
         <pc:spChg chg="mod">
-          <ac:chgData name="Yu Mi" userId="3ba48dc33aa0ce78" providerId="LiveId" clId="{3F5FB2F0-E656-4E65-B5A1-573F7D5D3E8D}" dt="2026-02-10T03:47:17.477" v="90" actId="1076"/>
+          <ac:chgData name="Yu Mi" userId="3ba48dc33aa0ce78" providerId="LiveId" clId="{3F5FB2F0-E656-4E65-B5A1-573F7D5D3E8D}" dt="2026-02-10T04:16:22.612" v="93" actId="255"/>
           <ac:spMkLst>
             <pc:docMk/>
             <pc:sldMk cId="3851809487" sldId="257"/>
@@ -731,8 +731,8 @@
         </p:nvSpPr>
         <p:spPr>
           <a:xfrm>
-            <a:off x="55657" y="1280592"/>
-            <a:ext cx="738664" cy="8402300"/>
+            <a:off x="147990" y="1280592"/>
+            <a:ext cx="646331" cy="7017306"/>
           </a:xfrm>
           <a:prstGeom prst="rect">
             <a:avLst/>
@@ -746,12 +746,12 @@
           <a:lstStyle/>
           <a:p>
             <a:r>
-              <a:rPr lang="ja-JP" altLang="en-US" dirty="0"/>
+              <a:rPr lang="ja-JP" altLang="en-US" sz="1500" dirty="0"/>
               <a:t>ゼロインテリジェンストレーダー市場における機械学習トレーダーの影響の解析</a:t>
             </a:r>
           </a:p>
           <a:p>
-            <a:endParaRPr lang="ja-JP" altLang="en-US" dirty="0"/>
+            <a:endParaRPr lang="ja-JP" altLang="en-US" sz="1500" dirty="0"/>
           </a:p>
         </p:txBody>
       </p:sp>
